--- a/brochure/kordy/Kordy_Brochure.pptx
+++ b/brochure/kordy/Kordy_Brochure.pptx
@@ -1399,270 +1399,9 @@
           </a:ln>
         </p:spPr>
       </p:sp>
-      <p:sp>
-        <p:nvSpPr>
-          <p:cNvPr id="19" name="Text 17"/>
-          <p:cNvSpPr/>
-          <p:nvPr/>
-        </p:nvSpPr>
-        <p:spPr>
-          <a:xfrm>
-            <a:off x="3818304" y="566928"/>
-            <a:ext cx="3345696" cy="777240"/>
-          </a:xfrm>
-          <a:prstGeom prst="rect">
-            <a:avLst/>
-          </a:prstGeom>
-          <a:noFill/>
-          <a:ln/>
-        </p:spPr>
-        <p:txBody>
-          <a:bodyPr wrap="square" lIns="0" tIns="0" rIns="0" bIns="0" rtlCol="0" anchor="ctr"/>
-          <a:lstStyle/>
-          <a:p>
-            <a:pPr algn="l" indent="0" marL="0">
-              <a:buNone/>
-            </a:pPr>
-            <a:r>
-              <a:rPr lang="en-US" sz="4600" b="1" dirty="0">
-                <a:solidFill>
-                  <a:srgbClr val="FFFFFF"/>
-                </a:solidFill>
-                <a:latin typeface="Cambria" pitchFamily="34" charset="0"/>
-                <a:ea typeface="Cambria" pitchFamily="34" charset="-122"/>
-                <a:cs typeface="Cambria" pitchFamily="34" charset="-120"/>
-              </a:rPr>
-              <a:t>Kordy</a:t>
-            </a:r>
-            <a:pPr algn="l" indent="0" marL="0">
-              <a:buNone/>
-            </a:pPr>
-            <a:r>
-              <a:rPr lang="en-US" sz="4600" b="1" dirty="0">
-                <a:solidFill>
-                  <a:srgbClr val="18BFBF"/>
-                </a:solidFill>
-                <a:latin typeface="Cambria" pitchFamily="34" charset="0"/>
-                <a:ea typeface="Cambria" pitchFamily="34" charset="-122"/>
-                <a:cs typeface="Cambria" pitchFamily="34" charset="-120"/>
-              </a:rPr>
-              <a:t>.</a:t>
-            </a:r>
-            <a:endParaRPr lang="en-US" sz="4600" dirty="0"/>
-          </a:p>
-        </p:txBody>
-      </p:sp>
-      <p:sp>
-        <p:nvSpPr>
-          <p:cNvPr id="20" name="Text 18"/>
-          <p:cNvSpPr/>
-          <p:nvPr/>
-        </p:nvSpPr>
-        <p:spPr>
-          <a:xfrm>
-            <a:off x="3845736" y="1371600"/>
-            <a:ext cx="3345696" cy="274320"/>
-          </a:xfrm>
-          <a:prstGeom prst="rect">
-            <a:avLst/>
-          </a:prstGeom>
-          <a:noFill/>
-          <a:ln/>
-        </p:spPr>
-        <p:txBody>
-          <a:bodyPr wrap="square" lIns="0" tIns="0" rIns="0" bIns="0" rtlCol="0" anchor="ctr"/>
-          <a:lstStyle/>
-          <a:p>
-            <a:pPr algn="l" indent="0" marL="0">
-              <a:buNone/>
-            </a:pPr>
-            <a:r>
-              <a:rPr lang="en-US" sz="1050" b="1" spc="300" kern="0" dirty="0">
-                <a:solidFill>
-                  <a:srgbClr val="18BFBF"/>
-                </a:solidFill>
-                <a:latin typeface="Calibri" pitchFamily="34" charset="0"/>
-                <a:ea typeface="Calibri" pitchFamily="34" charset="-122"/>
-                <a:cs typeface="Calibri" pitchFamily="34" charset="-120"/>
-              </a:rPr>
-              <a:t>MEDICAL ACCESS IN KOREA</a:t>
-            </a:r>
-            <a:endParaRPr lang="en-US" sz="1050" dirty="0"/>
-          </a:p>
-        </p:txBody>
-      </p:sp>
-      <p:sp>
-        <p:nvSpPr>
-          <p:cNvPr id="21" name="Shape 19"/>
-          <p:cNvSpPr/>
-          <p:nvPr/>
-        </p:nvSpPr>
-        <p:spPr>
-          <a:xfrm>
-            <a:off x="3845736" y="1755648"/>
-            <a:ext cx="822960" cy="0"/>
-          </a:xfrm>
-          <a:prstGeom prst="line">
-            <a:avLst/>
-          </a:prstGeom>
-          <a:noFill/>
-          <a:ln w="19050">
-            <a:solidFill>
-              <a:srgbClr val="18BFBF"/>
-            </a:solidFill>
-            <a:prstDash val="solid"/>
-          </a:ln>
-        </p:spPr>
-      </p:sp>
-      <p:sp>
-        <p:nvSpPr>
-          <p:cNvPr id="22" name="Text 20"/>
-          <p:cNvSpPr/>
-          <p:nvPr/>
-        </p:nvSpPr>
-        <p:spPr>
-          <a:xfrm>
-            <a:off x="3818304" y="2148840"/>
-            <a:ext cx="3345696" cy="1371600"/>
-          </a:xfrm>
-          <a:prstGeom prst="rect">
-            <a:avLst/>
-          </a:prstGeom>
-          <a:noFill/>
-          <a:ln/>
-        </p:spPr>
-        <p:txBody>
-          <a:bodyPr wrap="square" lIns="0" tIns="0" rIns="0" bIns="0" rtlCol="0" anchor="ctr"/>
-          <a:lstStyle/>
-          <a:p>
-            <a:pPr algn="l" indent="0" marL="0">
-              <a:lnSpc>
-                <a:spcPct val="100000"/>
-              </a:lnSpc>
-              <a:buNone/>
-            </a:pPr>
-            <a:r>
-              <a:rPr lang="en-US" sz="2700" b="1" dirty="0">
-                <a:solidFill>
-                  <a:srgbClr val="FFFFFF"/>
-                </a:solidFill>
-                <a:latin typeface="Cambria" pitchFamily="34" charset="0"/>
-                <a:ea typeface="Cambria" pitchFamily="34" charset="-122"/>
-                <a:cs typeface="Cambria" pitchFamily="34" charset="-120"/>
-              </a:rPr>
-              <a:t>Trusted Access to Medical Care in Korea</a:t>
-            </a:r>
-            <a:endParaRPr lang="en-US" sz="2700" dirty="0"/>
-          </a:p>
-        </p:txBody>
-      </p:sp>
-      <p:sp>
-        <p:nvSpPr>
-          <p:cNvPr id="23" name="Text 21"/>
-          <p:cNvSpPr/>
-          <p:nvPr/>
-        </p:nvSpPr>
-        <p:spPr>
-          <a:xfrm>
-            <a:off x="3818304" y="3611880"/>
-            <a:ext cx="3345696" cy="1005840"/>
-          </a:xfrm>
-          <a:prstGeom prst="rect">
-            <a:avLst/>
-          </a:prstGeom>
-          <a:noFill/>
-          <a:ln/>
-        </p:spPr>
-        <p:txBody>
-          <a:bodyPr wrap="square" lIns="0" tIns="0" rIns="0" bIns="0" rtlCol="0" anchor="ctr"/>
-          <a:lstStyle/>
-          <a:p>
-            <a:pPr algn="l" indent="0" marL="0">
-              <a:lnSpc>
-                <a:spcPct val="112000"/>
-              </a:lnSpc>
-              <a:buNone/>
-            </a:pPr>
-            <a:r>
-              <a:rPr lang="en-US" sz="1200" dirty="0">
-                <a:solidFill>
-                  <a:srgbClr val="AFC7D8"/>
-                </a:solidFill>
-                <a:latin typeface="Calibri" pitchFamily="34" charset="0"/>
-                <a:ea typeface="Calibri" pitchFamily="34" charset="-122"/>
-                <a:cs typeface="Calibri" pitchFamily="34" charset="-120"/>
-              </a:rPr>
-              <a:t>Kordy connects international patients with leading hospitals, specialist pathways, and guided care coordination across Korea.</a:t>
-            </a:r>
-            <a:endParaRPr lang="en-US" sz="1200" dirty="0"/>
-          </a:p>
-        </p:txBody>
-      </p:sp>
-      <p:sp>
-        <p:nvSpPr>
-          <p:cNvPr id="24" name="Text 22"/>
-          <p:cNvSpPr/>
-          <p:nvPr/>
-        </p:nvSpPr>
-        <p:spPr>
-          <a:xfrm>
-            <a:off x="3818304" y="4617720"/>
-            <a:ext cx="3345696" cy="822960"/>
-          </a:xfrm>
-          <a:prstGeom prst="rect">
-            <a:avLst/>
-          </a:prstGeom>
-          <a:noFill/>
-          <a:ln/>
-        </p:spPr>
-        <p:txBody>
-          <a:bodyPr wrap="square" lIns="0" tIns="0" rIns="0" bIns="0" rtlCol="0" anchor="ctr"/>
-          <a:lstStyle/>
-          <a:p>
-            <a:pPr algn="l" indent="0" marL="0">
-              <a:lnSpc>
-                <a:spcPct val="110000"/>
-              </a:lnSpc>
-              <a:buNone/>
-            </a:pPr>
-            <a:r>
-              <a:rPr lang="en-US" sz="1100" i="1" dirty="0">
-                <a:solidFill>
-                  <a:srgbClr val="18BFBF"/>
-                </a:solidFill>
-                <a:latin typeface="Calibri" pitchFamily="34" charset="0"/>
-                <a:ea typeface="Calibri" pitchFamily="34" charset="-122"/>
-                <a:cs typeface="Calibri" pitchFamily="34" charset="-120"/>
-              </a:rPr>
-              <a:t>A structured gateway to hospital access, treatment planning, and patient support in Korea.</a:t>
-            </a:r>
-            <a:endParaRPr lang="en-US" sz="1100" dirty="0"/>
-          </a:p>
-        </p:txBody>
-      </p:sp>
-      <p:sp>
-        <p:nvSpPr>
-          <p:cNvPr id="25" name="Shape 23"/>
-          <p:cNvSpPr/>
-          <p:nvPr/>
-        </p:nvSpPr>
-        <p:spPr>
-          <a:xfrm>
-            <a:off x="3818304" y="6656832"/>
-            <a:ext cx="256032" cy="256032"/>
-          </a:xfrm>
-          <a:prstGeom prst="ellipse">
-            <a:avLst/>
-          </a:prstGeom>
-          <a:solidFill>
-            <a:srgbClr val="18BFBF"/>
-          </a:solidFill>
-          <a:ln/>
-        </p:spPr>
-      </p:sp>
       <p:pic>
         <p:nvPicPr>
-          <p:cNvPr id="26" name="Image 0" descr="preencoded.png">    </p:cNvPr>
+          <p:cNvPr id="19" name="Image 0" descr="preencoded.png">    </p:cNvPr>
           <p:cNvPicPr>
             <a:picLocks noChangeAspect="1"/>
           </p:cNvPicPr>
@@ -1676,8 +1415,8 @@
         </p:blipFill>
         <p:spPr>
           <a:xfrm>
-            <a:off x="3886884" y="6725412"/>
-            <a:ext cx="118872" cy="118872"/>
+            <a:off x="3818304" y="512064"/>
+            <a:ext cx="512064" cy="612648"/>
           </a:xfrm>
           <a:prstGeom prst="rect">
             <a:avLst/>
@@ -1686,140 +1425,98 @@
       </p:pic>
       <p:sp>
         <p:nvSpPr>
-          <p:cNvPr id="27" name="Text 24"/>
-          <p:cNvSpPr/>
-          <p:nvPr/>
-        </p:nvSpPr>
-        <p:spPr>
-          <a:xfrm>
-            <a:off x="4147488" y="6565392"/>
-            <a:ext cx="3016512" cy="457200"/>
-          </a:xfrm>
-          <a:prstGeom prst="rect">
-            <a:avLst/>
-          </a:prstGeom>
-          <a:noFill/>
-          <a:ln/>
-        </p:spPr>
-        <p:txBody>
-          <a:bodyPr wrap="square" lIns="0" tIns="0" rIns="0" bIns="0" rtlCol="0" anchor="ctr"/>
-          <a:lstStyle/>
-          <a:p>
-            <a:pPr algn="l" indent="0" marL="0">
-              <a:lnSpc>
-                <a:spcPct val="105000"/>
-              </a:lnSpc>
-              <a:buNone/>
-            </a:pPr>
-            <a:r>
-              <a:rPr lang="en-US" sz="950" dirty="0">
-                <a:solidFill>
-                  <a:srgbClr val="AFC7D8"/>
-                </a:solidFill>
-                <a:latin typeface="Calibri" pitchFamily="34" charset="0"/>
-                <a:ea typeface="Calibri" pitchFamily="34" charset="-122"/>
-                <a:cs typeface="Calibri" pitchFamily="34" charset="-120"/>
-              </a:rPr>
-              <a:t>Operated by DYPHI, a registered medical tourism facilitator in Korea.</a:t>
-            </a:r>
-            <a:endParaRPr lang="en-US" sz="950" dirty="0"/>
-          </a:p>
-        </p:txBody>
-      </p:sp>
-      <p:sp>
-        <p:nvSpPr>
-          <p:cNvPr id="28" name="Text 25"/>
-          <p:cNvSpPr/>
-          <p:nvPr/>
-        </p:nvSpPr>
-        <p:spPr>
-          <a:xfrm>
-            <a:off x="3818304" y="7178040"/>
-            <a:ext cx="3345696" cy="365760"/>
-          </a:xfrm>
-          <a:prstGeom prst="rect">
-            <a:avLst/>
-          </a:prstGeom>
-          <a:noFill/>
-          <a:ln/>
-        </p:spPr>
-        <p:txBody>
-          <a:bodyPr wrap="square" lIns="0" tIns="0" rIns="0" bIns="0" rtlCol="0" anchor="ctr"/>
-          <a:lstStyle/>
-          <a:p>
-            <a:pPr algn="l" indent="0" marL="0">
-              <a:buNone/>
-            </a:pPr>
-            <a:r>
-              <a:rPr lang="en-US" sz="1500" b="1" dirty="0">
+          <p:cNvPr id="20" name="Text 17"/>
+          <p:cNvSpPr/>
+          <p:nvPr/>
+        </p:nvSpPr>
+        <p:spPr>
+          <a:xfrm>
+            <a:off x="4476672" y="530352"/>
+            <a:ext cx="2687328" cy="658368"/>
+          </a:xfrm>
+          <a:prstGeom prst="rect">
+            <a:avLst/>
+          </a:prstGeom>
+          <a:noFill/>
+          <a:ln/>
+        </p:spPr>
+        <p:txBody>
+          <a:bodyPr wrap="square" lIns="0" tIns="0" rIns="0" bIns="0" rtlCol="0" anchor="ctr"/>
+          <a:lstStyle/>
+          <a:p>
+            <a:pPr algn="l" indent="0" marL="0">
+              <a:buNone/>
+            </a:pPr>
+            <a:r>
+              <a:rPr lang="en-US" sz="4000" b="1" dirty="0">
                 <a:solidFill>
                   <a:srgbClr val="FFFFFF"/>
-                </a:solidFill>
-                <a:latin typeface="Calibri" pitchFamily="34" charset="0"/>
-                <a:ea typeface="Calibri" pitchFamily="34" charset="-122"/>
-                <a:cs typeface="Calibri" pitchFamily="34" charset="-120"/>
-              </a:rPr>
-              <a:t>kordy.kr</a:t>
-            </a:r>
-            <a:endParaRPr lang="en-US" sz="1500" dirty="0"/>
-          </a:p>
-        </p:txBody>
-      </p:sp>
-      <p:sp>
-        <p:nvSpPr>
-          <p:cNvPr id="29" name="Text 26"/>
-          <p:cNvSpPr/>
-          <p:nvPr/>
-        </p:nvSpPr>
-        <p:spPr>
-          <a:xfrm>
-            <a:off x="180000" y="225720"/>
-            <a:ext cx="3345696" cy="457200"/>
-          </a:xfrm>
-          <a:prstGeom prst="rect">
-            <a:avLst/>
-          </a:prstGeom>
-          <a:noFill/>
-          <a:ln/>
-        </p:spPr>
-        <p:txBody>
-          <a:bodyPr wrap="square" lIns="0" tIns="0" rIns="0" bIns="0" rtlCol="0" anchor="ctr"/>
-          <a:lstStyle/>
-          <a:p>
-            <a:pPr algn="l" indent="0" marL="0">
-              <a:buNone/>
-            </a:pPr>
-            <a:r>
-              <a:rPr lang="en-US" sz="2400" b="1" dirty="0">
-                <a:solidFill>
-                  <a:srgbClr val="0E3A5F"/>
                 </a:solidFill>
                 <a:latin typeface="Cambria" pitchFamily="34" charset="0"/>
                 <a:ea typeface="Cambria" pitchFamily="34" charset="-122"/>
                 <a:cs typeface="Cambria" pitchFamily="34" charset="-120"/>
               </a:rPr>
-              <a:t>Why Kordy</a:t>
-            </a:r>
-            <a:endParaRPr lang="en-US" sz="2400" dirty="0"/>
-          </a:p>
-        </p:txBody>
-      </p:sp>
-      <p:sp>
-        <p:nvSpPr>
-          <p:cNvPr id="30" name="Shape 27"/>
-          <p:cNvSpPr/>
-          <p:nvPr/>
-        </p:nvSpPr>
-        <p:spPr>
-          <a:xfrm>
-            <a:off x="180000" y="682920"/>
-            <a:ext cx="640080" cy="0"/>
+              <a:t>kordy</a:t>
+            </a:r>
+            <a:endParaRPr lang="en-US" sz="4000" dirty="0"/>
+          </a:p>
+        </p:txBody>
+      </p:sp>
+      <p:sp>
+        <p:nvSpPr>
+          <p:cNvPr id="21" name="Text 18"/>
+          <p:cNvSpPr/>
+          <p:nvPr/>
+        </p:nvSpPr>
+        <p:spPr>
+          <a:xfrm>
+            <a:off x="3845736" y="1371600"/>
+            <a:ext cx="3345696" cy="274320"/>
+          </a:xfrm>
+          <a:prstGeom prst="rect">
+            <a:avLst/>
+          </a:prstGeom>
+          <a:noFill/>
+          <a:ln/>
+        </p:spPr>
+        <p:txBody>
+          <a:bodyPr wrap="square" lIns="0" tIns="0" rIns="0" bIns="0" rtlCol="0" anchor="ctr"/>
+          <a:lstStyle/>
+          <a:p>
+            <a:pPr algn="l" indent="0" marL="0">
+              <a:buNone/>
+            </a:pPr>
+            <a:r>
+              <a:rPr lang="en-US" sz="1050" b="1" spc="300" kern="0" dirty="0">
+                <a:solidFill>
+                  <a:srgbClr val="18BFBF"/>
+                </a:solidFill>
+                <a:latin typeface="Calibri" pitchFamily="34" charset="0"/>
+                <a:ea typeface="Calibri" pitchFamily="34" charset="-122"/>
+                <a:cs typeface="Calibri" pitchFamily="34" charset="-120"/>
+              </a:rPr>
+              <a:t>MEDICAL ACCESS IN KOREA</a:t>
+            </a:r>
+            <a:endParaRPr lang="en-US" sz="1050" dirty="0"/>
+          </a:p>
+        </p:txBody>
+      </p:sp>
+      <p:sp>
+        <p:nvSpPr>
+          <p:cNvPr id="22" name="Shape 19"/>
+          <p:cNvSpPr/>
+          <p:nvPr/>
+        </p:nvSpPr>
+        <p:spPr>
+          <a:xfrm>
+            <a:off x="3845736" y="1755648"/>
+            <a:ext cx="822960" cy="0"/>
           </a:xfrm>
           <a:prstGeom prst="line">
             <a:avLst/>
           </a:prstGeom>
           <a:noFill/>
-          <a:ln w="25400">
+          <a:ln w="19050">
             <a:solidFill>
               <a:srgbClr val="18BFBF"/>
             </a:solidFill>
@@ -1829,27 +1526,153 @@
       </p:sp>
       <p:sp>
         <p:nvSpPr>
-          <p:cNvPr id="31" name="Shape 28"/>
-          <p:cNvSpPr/>
-          <p:nvPr/>
-        </p:nvSpPr>
-        <p:spPr>
-          <a:xfrm>
-            <a:off x="180000" y="884088"/>
-            <a:ext cx="347472" cy="347472"/>
+          <p:cNvPr id="23" name="Text 20"/>
+          <p:cNvSpPr/>
+          <p:nvPr/>
+        </p:nvSpPr>
+        <p:spPr>
+          <a:xfrm>
+            <a:off x="3818304" y="2148840"/>
+            <a:ext cx="3345696" cy="1371600"/>
+          </a:xfrm>
+          <a:prstGeom prst="rect">
+            <a:avLst/>
+          </a:prstGeom>
+          <a:noFill/>
+          <a:ln/>
+        </p:spPr>
+        <p:txBody>
+          <a:bodyPr wrap="square" lIns="0" tIns="0" rIns="0" bIns="0" rtlCol="0" anchor="ctr"/>
+          <a:lstStyle/>
+          <a:p>
+            <a:pPr algn="l" indent="0" marL="0">
+              <a:lnSpc>
+                <a:spcPct val="100000"/>
+              </a:lnSpc>
+              <a:buNone/>
+            </a:pPr>
+            <a:r>
+              <a:rPr lang="en-US" sz="2700" b="1" dirty="0">
+                <a:solidFill>
+                  <a:srgbClr val="FFFFFF"/>
+                </a:solidFill>
+                <a:latin typeface="Cambria" pitchFamily="34" charset="0"/>
+                <a:ea typeface="Cambria" pitchFamily="34" charset="-122"/>
+                <a:cs typeface="Cambria" pitchFamily="34" charset="-120"/>
+              </a:rPr>
+              <a:t>Trusted Access to Medical Care in Korea</a:t>
+            </a:r>
+            <a:endParaRPr lang="en-US" sz="2700" dirty="0"/>
+          </a:p>
+        </p:txBody>
+      </p:sp>
+      <p:sp>
+        <p:nvSpPr>
+          <p:cNvPr id="24" name="Text 21"/>
+          <p:cNvSpPr/>
+          <p:nvPr/>
+        </p:nvSpPr>
+        <p:spPr>
+          <a:xfrm>
+            <a:off x="3818304" y="3611880"/>
+            <a:ext cx="3345696" cy="1005840"/>
+          </a:xfrm>
+          <a:prstGeom prst="rect">
+            <a:avLst/>
+          </a:prstGeom>
+          <a:noFill/>
+          <a:ln/>
+        </p:spPr>
+        <p:txBody>
+          <a:bodyPr wrap="square" lIns="0" tIns="0" rIns="0" bIns="0" rtlCol="0" anchor="ctr"/>
+          <a:lstStyle/>
+          <a:p>
+            <a:pPr algn="l" indent="0" marL="0">
+              <a:lnSpc>
+                <a:spcPct val="112000"/>
+              </a:lnSpc>
+              <a:buNone/>
+            </a:pPr>
+            <a:r>
+              <a:rPr lang="en-US" sz="1200" dirty="0">
+                <a:solidFill>
+                  <a:srgbClr val="AFC7D8"/>
+                </a:solidFill>
+                <a:latin typeface="Calibri" pitchFamily="34" charset="0"/>
+                <a:ea typeface="Calibri" pitchFamily="34" charset="-122"/>
+                <a:cs typeface="Calibri" pitchFamily="34" charset="-120"/>
+              </a:rPr>
+              <a:t>Kordy connects international patients with leading hospitals, specialist pathways, and guided care coordination across Korea.</a:t>
+            </a:r>
+            <a:endParaRPr lang="en-US" sz="1200" dirty="0"/>
+          </a:p>
+        </p:txBody>
+      </p:sp>
+      <p:sp>
+        <p:nvSpPr>
+          <p:cNvPr id="25" name="Text 22"/>
+          <p:cNvSpPr/>
+          <p:nvPr/>
+        </p:nvSpPr>
+        <p:spPr>
+          <a:xfrm>
+            <a:off x="3818304" y="4617720"/>
+            <a:ext cx="3345696" cy="822960"/>
+          </a:xfrm>
+          <a:prstGeom prst="rect">
+            <a:avLst/>
+          </a:prstGeom>
+          <a:noFill/>
+          <a:ln/>
+        </p:spPr>
+        <p:txBody>
+          <a:bodyPr wrap="square" lIns="0" tIns="0" rIns="0" bIns="0" rtlCol="0" anchor="ctr"/>
+          <a:lstStyle/>
+          <a:p>
+            <a:pPr algn="l" indent="0" marL="0">
+              <a:lnSpc>
+                <a:spcPct val="110000"/>
+              </a:lnSpc>
+              <a:buNone/>
+            </a:pPr>
+            <a:r>
+              <a:rPr lang="en-US" sz="1100" i="1" dirty="0">
+                <a:solidFill>
+                  <a:srgbClr val="18BFBF"/>
+                </a:solidFill>
+                <a:latin typeface="Calibri" pitchFamily="34" charset="0"/>
+                <a:ea typeface="Calibri" pitchFamily="34" charset="-122"/>
+                <a:cs typeface="Calibri" pitchFamily="34" charset="-120"/>
+              </a:rPr>
+              <a:t>A structured gateway to hospital access, treatment planning, and patient support in Korea.</a:t>
+            </a:r>
+            <a:endParaRPr lang="en-US" sz="1100" dirty="0"/>
+          </a:p>
+        </p:txBody>
+      </p:sp>
+      <p:sp>
+        <p:nvSpPr>
+          <p:cNvPr id="26" name="Shape 23"/>
+          <p:cNvSpPr/>
+          <p:nvPr/>
+        </p:nvSpPr>
+        <p:spPr>
+          <a:xfrm>
+            <a:off x="3818304" y="6656832"/>
+            <a:ext cx="256032" cy="256032"/>
           </a:xfrm>
           <a:prstGeom prst="ellipse">
             <a:avLst/>
           </a:prstGeom>
           <a:solidFill>
-            <a:srgbClr val="F1F5F9"/>
+            <a:srgbClr val="18BFBF"/>
           </a:solidFill>
           <a:ln/>
         </p:spPr>
       </p:sp>
       <p:pic>
         <p:nvPicPr>
-          <p:cNvPr id="32" name="Image 1" descr="preencoded.png">    </p:cNvPr>
+          <p:cNvPr id="27" name="Image 1" descr="preencoded.png">    </p:cNvPr>
           <p:cNvPicPr>
             <a:picLocks noChangeAspect="1"/>
           </p:cNvPicPr>
@@ -1863,8 +1686,8 @@
         </p:blipFill>
         <p:spPr>
           <a:xfrm>
-            <a:off x="271440" y="975528"/>
-            <a:ext cx="164592" cy="164592"/>
+            <a:off x="3886884" y="6725412"/>
+            <a:ext cx="118872" cy="118872"/>
           </a:xfrm>
           <a:prstGeom prst="rect">
             <a:avLst/>
@@ -1873,14 +1696,14 @@
       </p:pic>
       <p:sp>
         <p:nvSpPr>
-          <p:cNvPr id="33" name="Text 29"/>
-          <p:cNvSpPr/>
-          <p:nvPr/>
-        </p:nvSpPr>
-        <p:spPr>
-          <a:xfrm>
-            <a:off x="637200" y="829224"/>
-            <a:ext cx="2888496" cy="457200"/>
+          <p:cNvPr id="28" name="Text 24"/>
+          <p:cNvSpPr/>
+          <p:nvPr/>
+        </p:nvSpPr>
+        <p:spPr>
+          <a:xfrm>
+            <a:off x="4147488" y="6565392"/>
+            <a:ext cx="3016512" cy="457200"/>
           </a:xfrm>
           <a:prstGeom prst="rect">
             <a:avLst/>
@@ -1894,34 +1717,135 @@
           <a:p>
             <a:pPr algn="l" indent="0" marL="0">
               <a:lnSpc>
-                <a:spcPct val="100000"/>
+                <a:spcPct val="105000"/>
               </a:lnSpc>
               <a:buNone/>
             </a:pPr>
             <a:r>
-              <a:rPr lang="en-US" sz="1100" dirty="0">
-                <a:solidFill>
-                  <a:srgbClr val="1B2A3A"/>
-                </a:solidFill>
-                <a:latin typeface="Calibri" pitchFamily="34" charset="0"/>
-                <a:ea typeface="Calibri" pitchFamily="34" charset="-122"/>
-                <a:cs typeface="Calibri" pitchFamily="34" charset="-120"/>
-              </a:rPr>
-              <a:t>Personalized hospital matching</a:t>
-            </a:r>
-            <a:endParaRPr lang="en-US" sz="1100" dirty="0"/>
-          </a:p>
-        </p:txBody>
-      </p:sp>
-      <p:sp>
-        <p:nvSpPr>
-          <p:cNvPr id="34" name="Shape 30"/>
-          <p:cNvSpPr/>
-          <p:nvPr/>
-        </p:nvSpPr>
-        <p:spPr>
-          <a:xfrm>
-            <a:off x="180000" y="1341288"/>
+              <a:rPr lang="en-US" sz="950" dirty="0">
+                <a:solidFill>
+                  <a:srgbClr val="AFC7D8"/>
+                </a:solidFill>
+                <a:latin typeface="Calibri" pitchFamily="34" charset="0"/>
+                <a:ea typeface="Calibri" pitchFamily="34" charset="-122"/>
+                <a:cs typeface="Calibri" pitchFamily="34" charset="-120"/>
+              </a:rPr>
+              <a:t>Operated by DYPHI, a registered medical tourism facilitator in Korea.</a:t>
+            </a:r>
+            <a:endParaRPr lang="en-US" sz="950" dirty="0"/>
+          </a:p>
+        </p:txBody>
+      </p:sp>
+      <p:sp>
+        <p:nvSpPr>
+          <p:cNvPr id="29" name="Text 25"/>
+          <p:cNvSpPr/>
+          <p:nvPr/>
+        </p:nvSpPr>
+        <p:spPr>
+          <a:xfrm>
+            <a:off x="3818304" y="7178040"/>
+            <a:ext cx="3345696" cy="365760"/>
+          </a:xfrm>
+          <a:prstGeom prst="rect">
+            <a:avLst/>
+          </a:prstGeom>
+          <a:noFill/>
+          <a:ln/>
+        </p:spPr>
+        <p:txBody>
+          <a:bodyPr wrap="square" lIns="0" tIns="0" rIns="0" bIns="0" rtlCol="0" anchor="ctr"/>
+          <a:lstStyle/>
+          <a:p>
+            <a:pPr algn="l" indent="0" marL="0">
+              <a:buNone/>
+            </a:pPr>
+            <a:r>
+              <a:rPr lang="en-US" sz="1500" b="1" dirty="0">
+                <a:solidFill>
+                  <a:srgbClr val="FFFFFF"/>
+                </a:solidFill>
+                <a:latin typeface="Calibri" pitchFamily="34" charset="0"/>
+                <a:ea typeface="Calibri" pitchFamily="34" charset="-122"/>
+                <a:cs typeface="Calibri" pitchFamily="34" charset="-120"/>
+              </a:rPr>
+              <a:t>kordy.kr</a:t>
+            </a:r>
+            <a:endParaRPr lang="en-US" sz="1500" dirty="0"/>
+          </a:p>
+        </p:txBody>
+      </p:sp>
+      <p:sp>
+        <p:nvSpPr>
+          <p:cNvPr id="30" name="Text 26"/>
+          <p:cNvSpPr/>
+          <p:nvPr/>
+        </p:nvSpPr>
+        <p:spPr>
+          <a:xfrm>
+            <a:off x="180000" y="225720"/>
+            <a:ext cx="3345696" cy="457200"/>
+          </a:xfrm>
+          <a:prstGeom prst="rect">
+            <a:avLst/>
+          </a:prstGeom>
+          <a:noFill/>
+          <a:ln/>
+        </p:spPr>
+        <p:txBody>
+          <a:bodyPr wrap="square" lIns="0" tIns="0" rIns="0" bIns="0" rtlCol="0" anchor="ctr"/>
+          <a:lstStyle/>
+          <a:p>
+            <a:pPr algn="l" indent="0" marL="0">
+              <a:buNone/>
+            </a:pPr>
+            <a:r>
+              <a:rPr lang="en-US" sz="2400" b="1" dirty="0">
+                <a:solidFill>
+                  <a:srgbClr val="0E3A5F"/>
+                </a:solidFill>
+                <a:latin typeface="Cambria" pitchFamily="34" charset="0"/>
+                <a:ea typeface="Cambria" pitchFamily="34" charset="-122"/>
+                <a:cs typeface="Cambria" pitchFamily="34" charset="-120"/>
+              </a:rPr>
+              <a:t>Why Kordy</a:t>
+            </a:r>
+            <a:endParaRPr lang="en-US" sz="2400" dirty="0"/>
+          </a:p>
+        </p:txBody>
+      </p:sp>
+      <p:sp>
+        <p:nvSpPr>
+          <p:cNvPr id="31" name="Shape 27"/>
+          <p:cNvSpPr/>
+          <p:nvPr/>
+        </p:nvSpPr>
+        <p:spPr>
+          <a:xfrm>
+            <a:off x="180000" y="682920"/>
+            <a:ext cx="640080" cy="0"/>
+          </a:xfrm>
+          <a:prstGeom prst="line">
+            <a:avLst/>
+          </a:prstGeom>
+          <a:noFill/>
+          <a:ln w="25400">
+            <a:solidFill>
+              <a:srgbClr val="18BFBF"/>
+            </a:solidFill>
+            <a:prstDash val="solid"/>
+          </a:ln>
+        </p:spPr>
+      </p:sp>
+      <p:sp>
+        <p:nvSpPr>
+          <p:cNvPr id="32" name="Shape 28"/>
+          <p:cNvSpPr/>
+          <p:nvPr/>
+        </p:nvSpPr>
+        <p:spPr>
+          <a:xfrm>
+            <a:off x="180000" y="884088"/>
             <a:ext cx="347472" cy="347472"/>
           </a:xfrm>
           <a:prstGeom prst="ellipse">
@@ -1935,7 +1859,7 @@
       </p:sp>
       <p:pic>
         <p:nvPicPr>
-          <p:cNvPr id="35" name="Image 2" descr="preencoded.png">    </p:cNvPr>
+          <p:cNvPr id="33" name="Image 2" descr="preencoded.png">    </p:cNvPr>
           <p:cNvPicPr>
             <a:picLocks noChangeAspect="1"/>
           </p:cNvPicPr>
@@ -1949,7 +1873,7 @@
         </p:blipFill>
         <p:spPr>
           <a:xfrm>
-            <a:off x="271440" y="1432728"/>
+            <a:off x="271440" y="975528"/>
             <a:ext cx="164592" cy="164592"/>
           </a:xfrm>
           <a:prstGeom prst="rect">
@@ -1959,13 +1883,13 @@
       </p:pic>
       <p:sp>
         <p:nvSpPr>
-          <p:cNvPr id="36" name="Text 31"/>
-          <p:cNvSpPr/>
-          <p:nvPr/>
-        </p:nvSpPr>
-        <p:spPr>
-          <a:xfrm>
-            <a:off x="637200" y="1286424"/>
+          <p:cNvPr id="34" name="Text 29"/>
+          <p:cNvSpPr/>
+          <p:nvPr/>
+        </p:nvSpPr>
+        <p:spPr>
+          <a:xfrm>
+            <a:off x="637200" y="829224"/>
             <a:ext cx="2888496" cy="457200"/>
           </a:xfrm>
           <a:prstGeom prst="rect">
@@ -1993,7 +1917,7 @@
                 <a:ea typeface="Calibri" pitchFamily="34" charset="-122"/>
                 <a:cs typeface="Calibri" pitchFamily="34" charset="-120"/>
               </a:rPr>
-              <a:t>Appointment &amp; medical record coordination</a:t>
+              <a:t>Personalized hospital matching</a:t>
             </a:r>
             <a:endParaRPr lang="en-US" sz="1100" dirty="0"/>
           </a:p>
@@ -2001,13 +1925,13 @@
       </p:sp>
       <p:sp>
         <p:nvSpPr>
-          <p:cNvPr id="37" name="Shape 32"/>
-          <p:cNvSpPr/>
-          <p:nvPr/>
-        </p:nvSpPr>
-        <p:spPr>
-          <a:xfrm>
-            <a:off x="180000" y="1798488"/>
+          <p:cNvPr id="35" name="Shape 30"/>
+          <p:cNvSpPr/>
+          <p:nvPr/>
+        </p:nvSpPr>
+        <p:spPr>
+          <a:xfrm>
+            <a:off x="180000" y="1341288"/>
             <a:ext cx="347472" cy="347472"/>
           </a:xfrm>
           <a:prstGeom prst="ellipse">
@@ -2021,7 +1945,7 @@
       </p:sp>
       <p:pic>
         <p:nvPicPr>
-          <p:cNvPr id="38" name="Image 3" descr="preencoded.png">    </p:cNvPr>
+          <p:cNvPr id="36" name="Image 3" descr="preencoded.png">    </p:cNvPr>
           <p:cNvPicPr>
             <a:picLocks noChangeAspect="1"/>
           </p:cNvPicPr>
@@ -2035,7 +1959,7 @@
         </p:blipFill>
         <p:spPr>
           <a:xfrm>
-            <a:off x="271440" y="1889928"/>
+            <a:off x="271440" y="1432728"/>
             <a:ext cx="164592" cy="164592"/>
           </a:xfrm>
           <a:prstGeom prst="rect">
@@ -2045,13 +1969,13 @@
       </p:pic>
       <p:sp>
         <p:nvSpPr>
-          <p:cNvPr id="39" name="Text 33"/>
-          <p:cNvSpPr/>
-          <p:nvPr/>
-        </p:nvSpPr>
-        <p:spPr>
-          <a:xfrm>
-            <a:off x="637200" y="1743624"/>
+          <p:cNvPr id="37" name="Text 31"/>
+          <p:cNvSpPr/>
+          <p:nvPr/>
+        </p:nvSpPr>
+        <p:spPr>
+          <a:xfrm>
+            <a:off x="637200" y="1286424"/>
             <a:ext cx="2888496" cy="457200"/>
           </a:xfrm>
           <a:prstGeom prst="rect">
@@ -2079,7 +2003,7 @@
                 <a:ea typeface="Calibri" pitchFamily="34" charset="-122"/>
                 <a:cs typeface="Calibri" pitchFamily="34" charset="-120"/>
               </a:rPr>
-              <a:t>Multilingual patient support</a:t>
+              <a:t>Appointment &amp; medical record coordination</a:t>
             </a:r>
             <a:endParaRPr lang="en-US" sz="1100" dirty="0"/>
           </a:p>
@@ -2087,13 +2011,13 @@
       </p:sp>
       <p:sp>
         <p:nvSpPr>
-          <p:cNvPr id="40" name="Shape 34"/>
-          <p:cNvSpPr/>
-          <p:nvPr/>
-        </p:nvSpPr>
-        <p:spPr>
-          <a:xfrm>
-            <a:off x="180000" y="2255688"/>
+          <p:cNvPr id="38" name="Shape 32"/>
+          <p:cNvSpPr/>
+          <p:nvPr/>
+        </p:nvSpPr>
+        <p:spPr>
+          <a:xfrm>
+            <a:off x="180000" y="1798488"/>
             <a:ext cx="347472" cy="347472"/>
           </a:xfrm>
           <a:prstGeom prst="ellipse">
@@ -2107,7 +2031,7 @@
       </p:sp>
       <p:pic>
         <p:nvPicPr>
-          <p:cNvPr id="41" name="Image 4" descr="preencoded.png">    </p:cNvPr>
+          <p:cNvPr id="39" name="Image 4" descr="preencoded.png">    </p:cNvPr>
           <p:cNvPicPr>
             <a:picLocks noChangeAspect="1"/>
           </p:cNvPicPr>
@@ -2121,7 +2045,7 @@
         </p:blipFill>
         <p:spPr>
           <a:xfrm>
-            <a:off x="271440" y="2347128"/>
+            <a:off x="271440" y="1889928"/>
             <a:ext cx="164592" cy="164592"/>
           </a:xfrm>
           <a:prstGeom prst="rect">
@@ -2131,13 +2055,13 @@
       </p:pic>
       <p:sp>
         <p:nvSpPr>
-          <p:cNvPr id="42" name="Text 35"/>
-          <p:cNvSpPr/>
-          <p:nvPr/>
-        </p:nvSpPr>
-        <p:spPr>
-          <a:xfrm>
-            <a:off x="637200" y="2200824"/>
+          <p:cNvPr id="40" name="Text 33"/>
+          <p:cNvSpPr/>
+          <p:nvPr/>
+        </p:nvSpPr>
+        <p:spPr>
+          <a:xfrm>
+            <a:off x="637200" y="1743624"/>
             <a:ext cx="2888496" cy="457200"/>
           </a:xfrm>
           <a:prstGeom prst="rect">
@@ -2165,7 +2089,7 @@
                 <a:ea typeface="Calibri" pitchFamily="34" charset="-122"/>
                 <a:cs typeface="Calibri" pitchFamily="34" charset="-120"/>
               </a:rPr>
-              <a:t>Guided care journey — inquiry to follow-up</a:t>
+              <a:t>Multilingual patient support</a:t>
             </a:r>
             <a:endParaRPr lang="en-US" sz="1100" dirty="0"/>
           </a:p>
@@ -2173,13 +2097,13 @@
       </p:sp>
       <p:sp>
         <p:nvSpPr>
-          <p:cNvPr id="43" name="Shape 36"/>
-          <p:cNvSpPr/>
-          <p:nvPr/>
-        </p:nvSpPr>
-        <p:spPr>
-          <a:xfrm>
-            <a:off x="180000" y="2712888"/>
+          <p:cNvPr id="41" name="Shape 34"/>
+          <p:cNvSpPr/>
+          <p:nvPr/>
+        </p:nvSpPr>
+        <p:spPr>
+          <a:xfrm>
+            <a:off x="180000" y="2255688"/>
             <a:ext cx="347472" cy="347472"/>
           </a:xfrm>
           <a:prstGeom prst="ellipse">
@@ -2193,7 +2117,7 @@
       </p:sp>
       <p:pic>
         <p:nvPicPr>
-          <p:cNvPr id="44" name="Image 5" descr="preencoded.png">    </p:cNvPr>
+          <p:cNvPr id="42" name="Image 5" descr="preencoded.png">    </p:cNvPr>
           <p:cNvPicPr>
             <a:picLocks noChangeAspect="1"/>
           </p:cNvPicPr>
@@ -2207,7 +2131,7 @@
         </p:blipFill>
         <p:spPr>
           <a:xfrm>
-            <a:off x="271440" y="2804328"/>
+            <a:off x="271440" y="2347128"/>
             <a:ext cx="164592" cy="164592"/>
           </a:xfrm>
           <a:prstGeom prst="rect">
@@ -2217,13 +2141,13 @@
       </p:pic>
       <p:sp>
         <p:nvSpPr>
-          <p:cNvPr id="45" name="Text 37"/>
-          <p:cNvSpPr/>
-          <p:nvPr/>
-        </p:nvSpPr>
-        <p:spPr>
-          <a:xfrm>
-            <a:off x="637200" y="2658024"/>
+          <p:cNvPr id="43" name="Text 35"/>
+          <p:cNvSpPr/>
+          <p:nvPr/>
+        </p:nvSpPr>
+        <p:spPr>
+          <a:xfrm>
+            <a:off x="637200" y="2200824"/>
             <a:ext cx="2888496" cy="457200"/>
           </a:xfrm>
           <a:prstGeom prst="rect">
@@ -2251,7 +2175,7 @@
                 <a:ea typeface="Calibri" pitchFamily="34" charset="-122"/>
                 <a:cs typeface="Calibri" pitchFamily="34" charset="-120"/>
               </a:rPr>
-              <a:t>Access to major hospitals &amp; specialty centers</a:t>
+              <a:t>Guided care journey — inquiry to follow-up</a:t>
             </a:r>
             <a:endParaRPr lang="en-US" sz="1100" dirty="0"/>
           </a:p>
@@ -2259,183 +2183,27 @@
       </p:sp>
       <p:sp>
         <p:nvSpPr>
-          <p:cNvPr id="46" name="Text 38"/>
-          <p:cNvSpPr/>
-          <p:nvPr/>
-        </p:nvSpPr>
-        <p:spPr>
-          <a:xfrm>
-            <a:off x="180000" y="3188376"/>
-            <a:ext cx="3345696" cy="868680"/>
-          </a:xfrm>
-          <a:prstGeom prst="rect">
-            <a:avLst/>
-          </a:prstGeom>
-          <a:noFill/>
-          <a:ln/>
-        </p:spPr>
-        <p:txBody>
-          <a:bodyPr wrap="square" lIns="0" tIns="0" rIns="0" bIns="0" rtlCol="0" anchor="ctr"/>
-          <a:lstStyle/>
-          <a:p>
-            <a:pPr algn="l" indent="0" marL="0">
-              <a:lnSpc>
-                <a:spcPct val="112000"/>
-              </a:lnSpc>
-              <a:buNone/>
-            </a:pPr>
-            <a:r>
-              <a:rPr lang="en-US" sz="950" dirty="0">
-                <a:solidFill>
-                  <a:srgbClr val="667889"/>
-                </a:solidFill>
-                <a:latin typeface="Calibri" pitchFamily="34" charset="0"/>
-                <a:ea typeface="Calibri" pitchFamily="34" charset="-122"/>
-                <a:cs typeface="Calibri" pitchFamily="34" charset="-120"/>
-              </a:rPr>
-              <a:t>For many international patients, choosing the right hospital in Korea can be complex. Kordy helps simplify that process by guiding patients to appropriate institutions, treatment pathways, and next-step planning.</a:t>
-            </a:r>
-            <a:endParaRPr lang="en-US" sz="950" dirty="0"/>
-          </a:p>
-        </p:txBody>
-      </p:sp>
-      <p:sp>
-        <p:nvSpPr>
-          <p:cNvPr id="47" name="Shape 39"/>
-          <p:cNvSpPr/>
-          <p:nvPr/>
-        </p:nvSpPr>
-        <p:spPr>
-          <a:xfrm>
-            <a:off x="180000" y="4102776"/>
-            <a:ext cx="3345696" cy="1572768"/>
-          </a:xfrm>
-          <a:prstGeom prst="roundRect">
-            <a:avLst>
-              <a:gd name="adj" fmla="val 4651"/>
-            </a:avLst>
-          </a:prstGeom>
-          <a:solidFill>
-            <a:srgbClr val="0E3A5F"/>
-          </a:solidFill>
-          <a:ln/>
-        </p:spPr>
-      </p:sp>
-      <p:sp>
-        <p:nvSpPr>
-          <p:cNvPr id="48" name="Text 40"/>
-          <p:cNvSpPr/>
-          <p:nvPr/>
-        </p:nvSpPr>
-        <p:spPr>
-          <a:xfrm>
-            <a:off x="381168" y="4249080"/>
-            <a:ext cx="1928376" cy="320040"/>
-          </a:xfrm>
-          <a:prstGeom prst="rect">
-            <a:avLst/>
-          </a:prstGeom>
-          <a:noFill/>
-          <a:ln/>
-        </p:spPr>
-        <p:txBody>
-          <a:bodyPr wrap="square" lIns="0" tIns="0" rIns="0" bIns="0" rtlCol="0" anchor="ctr"/>
-          <a:lstStyle/>
-          <a:p>
-            <a:pPr algn="l" indent="0" marL="0">
-              <a:buNone/>
-            </a:pPr>
-            <a:r>
-              <a:rPr lang="en-US" sz="1500" b="1" dirty="0">
-                <a:solidFill>
-                  <a:srgbClr val="FFFFFF"/>
-                </a:solidFill>
-                <a:latin typeface="Cambria" pitchFamily="34" charset="0"/>
-                <a:ea typeface="Cambria" pitchFamily="34" charset="-122"/>
-                <a:cs typeface="Cambria" pitchFamily="34" charset="-120"/>
-              </a:rPr>
-              <a:t>Start Your Inquiry</a:t>
-            </a:r>
-            <a:endParaRPr lang="en-US" sz="1500" dirty="0"/>
-          </a:p>
-        </p:txBody>
-      </p:sp>
-      <p:sp>
-        <p:nvSpPr>
-          <p:cNvPr id="49" name="Text 41"/>
-          <p:cNvSpPr/>
-          <p:nvPr/>
-        </p:nvSpPr>
-        <p:spPr>
-          <a:xfrm>
-            <a:off x="381168" y="4596552"/>
-            <a:ext cx="1928376" cy="274320"/>
-          </a:xfrm>
-          <a:prstGeom prst="rect">
-            <a:avLst/>
-          </a:prstGeom>
-          <a:noFill/>
-          <a:ln/>
-        </p:spPr>
-        <p:txBody>
-          <a:bodyPr wrap="square" lIns="0" tIns="0" rIns="0" bIns="0" rtlCol="0" anchor="ctr"/>
-          <a:lstStyle/>
-          <a:p>
-            <a:pPr algn="l" indent="0" marL="0">
-              <a:buNone/>
-            </a:pPr>
-            <a:r>
-              <a:rPr lang="en-US" sz="1100" dirty="0">
-                <a:solidFill>
-                  <a:srgbClr val="AFC7D8"/>
-                </a:solidFill>
-                <a:latin typeface="Calibri" pitchFamily="34" charset="0"/>
-                <a:ea typeface="Calibri" pitchFamily="34" charset="-122"/>
-                <a:cs typeface="Calibri" pitchFamily="34" charset="-120"/>
-              </a:rPr>
-              <a:t>Website:  </a:t>
-            </a:r>
-            <a:pPr algn="l" indent="0" marL="0">
-              <a:buNone/>
-            </a:pPr>
-            <a:r>
-              <a:rPr lang="en-US" sz="1100" b="1" dirty="0">
-                <a:solidFill>
-                  <a:srgbClr val="18BFBF"/>
-                </a:solidFill>
-                <a:latin typeface="Calibri" pitchFamily="34" charset="0"/>
-                <a:ea typeface="Calibri" pitchFamily="34" charset="-122"/>
-                <a:cs typeface="Calibri" pitchFamily="34" charset="-120"/>
-              </a:rPr>
-              <a:t>kordy.kr</a:t>
-            </a:r>
-            <a:endParaRPr lang="en-US" sz="1100" dirty="0"/>
-          </a:p>
-        </p:txBody>
-      </p:sp>
-      <p:sp>
-        <p:nvSpPr>
-          <p:cNvPr id="50" name="Shape 42"/>
-          <p:cNvSpPr/>
-          <p:nvPr/>
-        </p:nvSpPr>
-        <p:spPr>
-          <a:xfrm>
-            <a:off x="353736" y="4907448"/>
-            <a:ext cx="274320" cy="274320"/>
+          <p:cNvPr id="44" name="Shape 36"/>
+          <p:cNvSpPr/>
+          <p:nvPr/>
+        </p:nvSpPr>
+        <p:spPr>
+          <a:xfrm>
+            <a:off x="180000" y="2712888"/>
+            <a:ext cx="347472" cy="347472"/>
           </a:xfrm>
           <a:prstGeom prst="ellipse">
             <a:avLst/>
           </a:prstGeom>
           <a:solidFill>
-            <a:srgbClr val="18BFBF"/>
+            <a:srgbClr val="F1F5F9"/>
           </a:solidFill>
           <a:ln/>
         </p:spPr>
       </p:sp>
       <p:pic>
         <p:nvPicPr>
-          <p:cNvPr id="51" name="Image 6" descr="preencoded.png">    </p:cNvPr>
+          <p:cNvPr id="45" name="Image 6" descr="preencoded.png">    </p:cNvPr>
           <p:cNvPicPr>
             <a:picLocks noChangeAspect="1"/>
           </p:cNvPicPr>
@@ -2449,8 +2217,8 @@
         </p:blipFill>
         <p:spPr>
           <a:xfrm>
-            <a:off x="417744" y="4971456"/>
-            <a:ext cx="146304" cy="146304"/>
+            <a:off x="271440" y="2804328"/>
+            <a:ext cx="164592" cy="164592"/>
           </a:xfrm>
           <a:prstGeom prst="rect">
             <a:avLst/>
@@ -2459,13 +2227,158 @@
       </p:pic>
       <p:sp>
         <p:nvSpPr>
-          <p:cNvPr id="52" name="Text 43"/>
-          <p:cNvSpPr/>
-          <p:nvPr/>
-        </p:nvSpPr>
-        <p:spPr>
-          <a:xfrm>
-            <a:off x="673776" y="4907448"/>
+          <p:cNvPr id="46" name="Text 37"/>
+          <p:cNvSpPr/>
+          <p:nvPr/>
+        </p:nvSpPr>
+        <p:spPr>
+          <a:xfrm>
+            <a:off x="637200" y="2658024"/>
+            <a:ext cx="2888496" cy="457200"/>
+          </a:xfrm>
+          <a:prstGeom prst="rect">
+            <a:avLst/>
+          </a:prstGeom>
+          <a:noFill/>
+          <a:ln/>
+        </p:spPr>
+        <p:txBody>
+          <a:bodyPr wrap="square" lIns="0" tIns="0" rIns="0" bIns="0" rtlCol="0" anchor="ctr"/>
+          <a:lstStyle/>
+          <a:p>
+            <a:pPr algn="l" indent="0" marL="0">
+              <a:lnSpc>
+                <a:spcPct val="100000"/>
+              </a:lnSpc>
+              <a:buNone/>
+            </a:pPr>
+            <a:r>
+              <a:rPr lang="en-US" sz="1100" dirty="0">
+                <a:solidFill>
+                  <a:srgbClr val="1B2A3A"/>
+                </a:solidFill>
+                <a:latin typeface="Calibri" pitchFamily="34" charset="0"/>
+                <a:ea typeface="Calibri" pitchFamily="34" charset="-122"/>
+                <a:cs typeface="Calibri" pitchFamily="34" charset="-120"/>
+              </a:rPr>
+              <a:t>Access to major hospitals &amp; specialty centers</a:t>
+            </a:r>
+            <a:endParaRPr lang="en-US" sz="1100" dirty="0"/>
+          </a:p>
+        </p:txBody>
+      </p:sp>
+      <p:sp>
+        <p:nvSpPr>
+          <p:cNvPr id="47" name="Text 38"/>
+          <p:cNvSpPr/>
+          <p:nvPr/>
+        </p:nvSpPr>
+        <p:spPr>
+          <a:xfrm>
+            <a:off x="180000" y="3188376"/>
+            <a:ext cx="3345696" cy="868680"/>
+          </a:xfrm>
+          <a:prstGeom prst="rect">
+            <a:avLst/>
+          </a:prstGeom>
+          <a:noFill/>
+          <a:ln/>
+        </p:spPr>
+        <p:txBody>
+          <a:bodyPr wrap="square" lIns="0" tIns="0" rIns="0" bIns="0" rtlCol="0" anchor="ctr"/>
+          <a:lstStyle/>
+          <a:p>
+            <a:pPr algn="l" indent="0" marL="0">
+              <a:lnSpc>
+                <a:spcPct val="112000"/>
+              </a:lnSpc>
+              <a:buNone/>
+            </a:pPr>
+            <a:r>
+              <a:rPr lang="en-US" sz="950" dirty="0">
+                <a:solidFill>
+                  <a:srgbClr val="667889"/>
+                </a:solidFill>
+                <a:latin typeface="Calibri" pitchFamily="34" charset="0"/>
+                <a:ea typeface="Calibri" pitchFamily="34" charset="-122"/>
+                <a:cs typeface="Calibri" pitchFamily="34" charset="-120"/>
+              </a:rPr>
+              <a:t>For many international patients, choosing the right hospital in Korea can be complex. Kordy helps simplify that process by guiding patients to appropriate institutions, treatment pathways, and next-step planning.</a:t>
+            </a:r>
+            <a:endParaRPr lang="en-US" sz="950" dirty="0"/>
+          </a:p>
+        </p:txBody>
+      </p:sp>
+      <p:sp>
+        <p:nvSpPr>
+          <p:cNvPr id="48" name="Shape 39"/>
+          <p:cNvSpPr/>
+          <p:nvPr/>
+        </p:nvSpPr>
+        <p:spPr>
+          <a:xfrm>
+            <a:off x="180000" y="4102776"/>
+            <a:ext cx="3345696" cy="1572768"/>
+          </a:xfrm>
+          <a:prstGeom prst="roundRect">
+            <a:avLst>
+              <a:gd name="adj" fmla="val 4651"/>
+            </a:avLst>
+          </a:prstGeom>
+          <a:solidFill>
+            <a:srgbClr val="0E3A5F"/>
+          </a:solidFill>
+          <a:ln/>
+        </p:spPr>
+      </p:sp>
+      <p:sp>
+        <p:nvSpPr>
+          <p:cNvPr id="49" name="Text 40"/>
+          <p:cNvSpPr/>
+          <p:nvPr/>
+        </p:nvSpPr>
+        <p:spPr>
+          <a:xfrm>
+            <a:off x="381168" y="4249080"/>
+            <a:ext cx="1928376" cy="320040"/>
+          </a:xfrm>
+          <a:prstGeom prst="rect">
+            <a:avLst/>
+          </a:prstGeom>
+          <a:noFill/>
+          <a:ln/>
+        </p:spPr>
+        <p:txBody>
+          <a:bodyPr wrap="square" lIns="0" tIns="0" rIns="0" bIns="0" rtlCol="0" anchor="ctr"/>
+          <a:lstStyle/>
+          <a:p>
+            <a:pPr algn="l" indent="0" marL="0">
+              <a:buNone/>
+            </a:pPr>
+            <a:r>
+              <a:rPr lang="en-US" sz="1500" b="1" dirty="0">
+                <a:solidFill>
+                  <a:srgbClr val="FFFFFF"/>
+                </a:solidFill>
+                <a:latin typeface="Cambria" pitchFamily="34" charset="0"/>
+                <a:ea typeface="Cambria" pitchFamily="34" charset="-122"/>
+                <a:cs typeface="Cambria" pitchFamily="34" charset="-120"/>
+              </a:rPr>
+              <a:t>Start Your Inquiry</a:t>
+            </a:r>
+            <a:endParaRPr lang="en-US" sz="1500" dirty="0"/>
+          </a:p>
+        </p:txBody>
+      </p:sp>
+      <p:sp>
+        <p:nvSpPr>
+          <p:cNvPr id="50" name="Text 41"/>
+          <p:cNvSpPr/>
+          <p:nvPr/>
+        </p:nvSpPr>
+        <p:spPr>
+          <a:xfrm>
+            <a:off x="381168" y="4596552"/>
             <a:ext cx="1928376" cy="274320"/>
           </a:xfrm>
           <a:prstGeom prst="rect">
@@ -2482,7 +2395,7 @@
               <a:buNone/>
             </a:pPr>
             <a:r>
-              <a:rPr lang="en-US" sz="900" dirty="0">
+              <a:rPr lang="en-US" sz="1100" dirty="0">
                 <a:solidFill>
                   <a:srgbClr val="AFC7D8"/>
                 </a:solidFill>
@@ -2490,21 +2403,35 @@
                 <a:ea typeface="Calibri" pitchFamily="34" charset="-122"/>
                 <a:cs typeface="Calibri" pitchFamily="34" charset="-120"/>
               </a:rPr>
-              <a:t>WhatsApp: +82 ___ ____ ____</a:t>
-            </a:r>
-            <a:endParaRPr lang="en-US" sz="900" dirty="0"/>
-          </a:p>
-        </p:txBody>
-      </p:sp>
-      <p:sp>
-        <p:nvSpPr>
-          <p:cNvPr id="53" name="Shape 44"/>
-          <p:cNvSpPr/>
-          <p:nvPr/>
-        </p:nvSpPr>
-        <p:spPr>
-          <a:xfrm>
-            <a:off x="353736" y="5245776"/>
+              <a:t>Website:  </a:t>
+            </a:r>
+            <a:pPr algn="l" indent="0" marL="0">
+              <a:buNone/>
+            </a:pPr>
+            <a:r>
+              <a:rPr lang="en-US" sz="1100" b="1" dirty="0">
+                <a:solidFill>
+                  <a:srgbClr val="18BFBF"/>
+                </a:solidFill>
+                <a:latin typeface="Calibri" pitchFamily="34" charset="0"/>
+                <a:ea typeface="Calibri" pitchFamily="34" charset="-122"/>
+                <a:cs typeface="Calibri" pitchFamily="34" charset="-120"/>
+              </a:rPr>
+              <a:t>kordy.kr</a:t>
+            </a:r>
+            <a:endParaRPr lang="en-US" sz="1100" dirty="0"/>
+          </a:p>
+        </p:txBody>
+      </p:sp>
+      <p:sp>
+        <p:nvSpPr>
+          <p:cNvPr id="51" name="Shape 42"/>
+          <p:cNvSpPr/>
+          <p:nvPr/>
+        </p:nvSpPr>
+        <p:spPr>
+          <a:xfrm>
+            <a:off x="353736" y="4907448"/>
             <a:ext cx="274320" cy="274320"/>
           </a:xfrm>
           <a:prstGeom prst="ellipse">
@@ -2518,7 +2445,7 @@
       </p:sp>
       <p:pic>
         <p:nvPicPr>
-          <p:cNvPr id="54" name="Image 7" descr="preencoded.png">    </p:cNvPr>
+          <p:cNvPr id="52" name="Image 7" descr="preencoded.png">    </p:cNvPr>
           <p:cNvPicPr>
             <a:picLocks noChangeAspect="1"/>
           </p:cNvPicPr>
@@ -2532,6 +2459,89 @@
         </p:blipFill>
         <p:spPr>
           <a:xfrm>
+            <a:off x="417744" y="4971456"/>
+            <a:ext cx="146304" cy="146304"/>
+          </a:xfrm>
+          <a:prstGeom prst="rect">
+            <a:avLst/>
+          </a:prstGeom>
+        </p:spPr>
+      </p:pic>
+      <p:sp>
+        <p:nvSpPr>
+          <p:cNvPr id="53" name="Text 43"/>
+          <p:cNvSpPr/>
+          <p:nvPr/>
+        </p:nvSpPr>
+        <p:spPr>
+          <a:xfrm>
+            <a:off x="673776" y="4907448"/>
+            <a:ext cx="1928376" cy="274320"/>
+          </a:xfrm>
+          <a:prstGeom prst="rect">
+            <a:avLst/>
+          </a:prstGeom>
+          <a:noFill/>
+          <a:ln/>
+        </p:spPr>
+        <p:txBody>
+          <a:bodyPr wrap="square" lIns="0" tIns="0" rIns="0" bIns="0" rtlCol="0" anchor="ctr"/>
+          <a:lstStyle/>
+          <a:p>
+            <a:pPr algn="l" indent="0" marL="0">
+              <a:buNone/>
+            </a:pPr>
+            <a:r>
+              <a:rPr lang="en-US" sz="900" dirty="0">
+                <a:solidFill>
+                  <a:srgbClr val="AFC7D8"/>
+                </a:solidFill>
+                <a:latin typeface="Calibri" pitchFamily="34" charset="0"/>
+                <a:ea typeface="Calibri" pitchFamily="34" charset="-122"/>
+                <a:cs typeface="Calibri" pitchFamily="34" charset="-120"/>
+              </a:rPr>
+              <a:t>WhatsApp: +82 ___ ____ ____</a:t>
+            </a:r>
+            <a:endParaRPr lang="en-US" sz="900" dirty="0"/>
+          </a:p>
+        </p:txBody>
+      </p:sp>
+      <p:sp>
+        <p:nvSpPr>
+          <p:cNvPr id="54" name="Shape 44"/>
+          <p:cNvSpPr/>
+          <p:nvPr/>
+        </p:nvSpPr>
+        <p:spPr>
+          <a:xfrm>
+            <a:off x="353736" y="5245776"/>
+            <a:ext cx="274320" cy="274320"/>
+          </a:xfrm>
+          <a:prstGeom prst="ellipse">
+            <a:avLst/>
+          </a:prstGeom>
+          <a:solidFill>
+            <a:srgbClr val="18BFBF"/>
+          </a:solidFill>
+          <a:ln/>
+        </p:spPr>
+      </p:sp>
+      <p:pic>
+        <p:nvPicPr>
+          <p:cNvPr id="55" name="Image 8" descr="preencoded.png">    </p:cNvPr>
+          <p:cNvPicPr>
+            <a:picLocks noChangeAspect="1"/>
+          </p:cNvPicPr>
+          <p:nvPr/>
+        </p:nvPicPr>
+        <p:blipFill>
+          <a:blip r:embed="rId9"/>
+          <a:stretch>
+            <a:fillRect/>
+          </a:stretch>
+        </p:blipFill>
+        <p:spPr>
+          <a:xfrm>
             <a:off x="417744" y="5309784"/>
             <a:ext cx="146304" cy="146304"/>
           </a:xfrm>
@@ -2542,7 +2552,7 @@
       </p:pic>
       <p:sp>
         <p:nvSpPr>
-          <p:cNvPr id="55" name="Text 45"/>
+          <p:cNvPr id="56" name="Text 45"/>
           <p:cNvSpPr/>
           <p:nvPr/>
         </p:nvSpPr>
@@ -2581,7 +2591,7 @@
       </p:sp>
       <p:sp>
         <p:nvSpPr>
-          <p:cNvPr id="56" name="Shape 46"/>
+          <p:cNvPr id="57" name="Shape 46"/>
           <p:cNvSpPr/>
           <p:nvPr/>
         </p:nvSpPr>
@@ -2608,7 +2618,7 @@
       </p:sp>
       <p:sp>
         <p:nvSpPr>
-          <p:cNvPr id="57" name="Shape 47"/>
+          <p:cNvPr id="58" name="Shape 47"/>
           <p:cNvSpPr/>
           <p:nvPr/>
         </p:nvSpPr>
@@ -2633,7 +2643,7 @@
       </p:sp>
       <p:sp>
         <p:nvSpPr>
-          <p:cNvPr id="58" name="Text 48"/>
+          <p:cNvPr id="59" name="Text 48"/>
           <p:cNvSpPr/>
           <p:nvPr/>
         </p:nvSpPr>
@@ -2689,7 +2699,7 @@
       </p:sp>
       <p:sp>
         <p:nvSpPr>
-          <p:cNvPr id="59" name="Text 49"/>
+          <p:cNvPr id="60" name="Text 49"/>
           <p:cNvSpPr/>
           <p:nvPr/>
         </p:nvSpPr>
@@ -2728,7 +2738,7 @@
       </p:sp>
       <p:sp>
         <p:nvSpPr>
-          <p:cNvPr id="60" name="Shape 50"/>
+          <p:cNvPr id="61" name="Shape 50"/>
           <p:cNvSpPr/>
           <p:nvPr/>
         </p:nvSpPr>
@@ -2748,7 +2758,7 @@
       </p:sp>
       <p:sp>
         <p:nvSpPr>
-          <p:cNvPr id="61" name="Text 51"/>
+          <p:cNvPr id="62" name="Text 51"/>
           <p:cNvSpPr/>
           <p:nvPr/>
         </p:nvSpPr>
@@ -2787,7 +2797,7 @@
       </p:sp>
       <p:sp>
         <p:nvSpPr>
-          <p:cNvPr id="62" name="Shape 52"/>
+          <p:cNvPr id="63" name="Shape 52"/>
           <p:cNvSpPr/>
           <p:nvPr/>
         </p:nvSpPr>
@@ -2807,7 +2817,7 @@
       </p:sp>
       <p:sp>
         <p:nvSpPr>
-          <p:cNvPr id="63" name="Text 53"/>
+          <p:cNvPr id="64" name="Text 53"/>
           <p:cNvSpPr/>
           <p:nvPr/>
         </p:nvSpPr>
@@ -2846,7 +2856,7 @@
       </p:sp>
       <p:sp>
         <p:nvSpPr>
-          <p:cNvPr id="64" name="Shape 54"/>
+          <p:cNvPr id="65" name="Shape 54"/>
           <p:cNvSpPr/>
           <p:nvPr/>
         </p:nvSpPr>
@@ -2866,7 +2876,7 @@
       </p:sp>
       <p:sp>
         <p:nvSpPr>
-          <p:cNvPr id="65" name="Text 55"/>
+          <p:cNvPr id="66" name="Text 55"/>
           <p:cNvSpPr/>
           <p:nvPr/>
         </p:nvSpPr>
@@ -2905,7 +2915,7 @@
       </p:sp>
       <p:sp>
         <p:nvSpPr>
-          <p:cNvPr id="66" name="Shape 56"/>
+          <p:cNvPr id="67" name="Shape 56"/>
           <p:cNvSpPr/>
           <p:nvPr/>
         </p:nvSpPr>
@@ -2925,7 +2935,7 @@
       </p:sp>
       <p:sp>
         <p:nvSpPr>
-          <p:cNvPr id="67" name="Text 57"/>
+          <p:cNvPr id="68" name="Text 57"/>
           <p:cNvSpPr/>
           <p:nvPr/>
         </p:nvSpPr>
@@ -2964,7 +2974,7 @@
       </p:sp>
       <p:sp>
         <p:nvSpPr>
-          <p:cNvPr id="68" name="Shape 58"/>
+          <p:cNvPr id="69" name="Shape 58"/>
           <p:cNvSpPr/>
           <p:nvPr/>
         </p:nvSpPr>
@@ -2987,7 +2997,7 @@
       </p:sp>
       <p:sp>
         <p:nvSpPr>
-          <p:cNvPr id="69" name="Text 59"/>
+          <p:cNvPr id="70" name="Text 59"/>
           <p:cNvSpPr/>
           <p:nvPr/>
         </p:nvSpPr>
